--- a/20260612.pptx
+++ b/20260612.pptx
@@ -223,7 +223,7 @@
           <a:p>
             <a:fld id="{DC9E0D3F-88AC-AC4C-A850-A113E8478B35}" type="datetimeFigureOut">
               <a:rPr kumimoji="1" lang="ja-JP" altLang="en-US" smtClean="0"/>
-              <a:t>2026/6/9</a:t>
+              <a:t>2026/6/12</a:t>
             </a:fld>
             <a:endParaRPr kumimoji="1" lang="ja-JP" altLang="en-US"/>
           </a:p>
@@ -4704,7 +4704,7 @@
           <a:p>
             <a:r>
               <a:rPr kumimoji="1" lang="en-US" altLang="ja-JP" dirty="0"/>
-              <a:t>2026-06-19</a:t>
+              <a:t>2026-06-12</a:t>
             </a:r>
           </a:p>
           <a:p>
